--- a/courses/小生意实用课/AI实用课_Codex提效.pptx
+++ b/courses/小生意实用课/AI实用课_Codex提效.pptx
@@ -2329,7 +2329,7 @@
           <a:p>
             <a:r>
               <a:rPr lang="en-US" dirty="0"/>
-              <a:t>设置里的集成下面有一项「电脑操控」，管 ChatGPT 怎么用你电脑上的其他软件。Chrome 和 Edge 要先装浏览器扩展，装好它就能帮你在网页上操作；Excel 打开开关，它就能通过加载项直接改表格，后面客户档案和业务报告都会用到。下面的始终允许的应用，先留空，让它每次用之前都问你。</a:t>
+              <a:t>设置里有一项「电脑操控」，管 ChatGPT 怎么用你电脑上的其他软件。Chrome 和 Edge 要先装浏览器扩展，装好它就能帮你在网页上操作；Excel 打开开关，它就能通过加载项直接改表格，后面客户档案和业务报告都会用到。下面的始终允许的应用，先留空，让它每次用之前都问你。</a:t>
             </a:r>
             <a:endParaRPr lang="en-US" dirty="0"/>
           </a:p>
@@ -3825,7 +3825,7 @@
           <a:p>
             <a:r>
               <a:rPr lang="en-US" dirty="0"/>
-              <a:t>很多人的客户信息散在聊天记录、订单里。把它们导出到文件夹，先删掉姓名、电话、身份证号，再让 Codex 按档案表的栏位整理。整理完随机抽几条和原始记录核对。原始记录不要删。</a:t>
+              <a:t>很多人的客户信息散在聊天记录、订单里。把它们导出到文件夹，先把姓名、电话换成客户代号，比如 C001，身份证号直接删掉；代号和真名的对照表留在自己电脑上，不要放进这个文件夹。再让 Codex 按档案表的栏位整理。整理完随机抽几条和原始记录核对。原始记录不要删。</a:t>
             </a:r>
             <a:endParaRPr lang="en-US" dirty="0"/>
           </a:p>
@@ -5497,7 +5497,7 @@
           <a:p>
             <a:r>
               <a:rPr lang="en-US" dirty="0"/>
-              <a:t>今天学的是个人提效。企业要的是另一件事：把 AI 和系统接进整个业务流程，几个部门、几十上百人一起用，串起报名、付款、通知、财务、合规，还要管权限、保证稳定、保护数据。难度完全不同。</a:t>
+              <a:t>今天学的是个人提效。企业要的是另一件事：把 AI 和系统接进整个业务流程，几个部门、几十上百人一起用，串起报名、付款、通知、财务、合规，还要管权限、保证稳定、保护数据。前面说的全自动发邮件也在这里：不经人看就发出去，必须有审核规则和发送记录。难度完全不同。</a:t>
             </a:r>
             <a:endParaRPr lang="en-US" dirty="0"/>
           </a:p>
@@ -6465,7 +6465,7 @@
           <a:p>
             <a:r>
               <a:rPr lang="en-US" dirty="0"/>
-              <a:t>怎么避免：给它资料，让它只按资料回答；在规矩里允许它说不知道；要它标出处；重要的数字自己核对；新的信息让它联网查；聊得太久就开新会话。待会儿我们给 AI 定的六条规矩里，第一条和第三条就是在防幻觉。</a:t>
+              <a:t>怎么避免：给它资料，让它只按资料回答；在规矩里允许它说不知道；要它标出处；重要的数字自己核对；新的信息让它联网查；聊得太久就开新会话。待会儿给 AI 定的六条准则里，第一条「不清楚先问」和第六条「先自己挑毛病」都能减少它乱编；「找不到就说不知道，不要猜」这一句，可以加在六条后面，做知识库时我们也会写进去。</a:t>
             </a:r>
             <a:endParaRPr lang="en-US" dirty="0"/>
           </a:p>
@@ -11969,7 +11969,7 @@
         </p:nvSpPr>
         <p:spPr>
           <a:xfrm>
-            <a:off x="6675120" y="3337560"/>
+            <a:off x="6446520" y="3337560"/>
             <a:ext cx="2148840" cy="685800"/>
           </a:xfrm>
           <a:prstGeom prst="roundRect">
@@ -12218,9 +12218,9 @@
               <a:tblPr/>
               <a:tblGrid>
                 <a:gridCol w="1430528"/>
-                <a:gridCol w="1251712"/>
-                <a:gridCol w="3218688"/>
-                <a:gridCol w="2145792"/>
+                <a:gridCol w="983488"/>
+                <a:gridCol w="3039872"/>
+                <a:gridCol w="2592832"/>
               </a:tblGrid>
               <a:tr h="457200">
                 <a:tc>
@@ -14333,9 +14333,9 @@
             <a:tbl>
               <a:tblPr/>
               <a:tblGrid>
-                <a:gridCol w="1788160"/>
+                <a:gridCol w="1698752"/>
+                <a:gridCol w="3129280"/>
                 <a:gridCol w="3218688"/>
-                <a:gridCol w="3039872"/>
               </a:tblGrid>
               <a:tr h="457200">
                 <a:tc>
@@ -14903,7 +14903,7 @@
                           <a:ea typeface="Microsoft YaHei" pitchFamily="34" charset="-122"/>
                           <a:cs typeface="Microsoft YaHei" pitchFamily="34" charset="-120"/>
                         </a:rPr>
-                        <a:t>手机上帮你订、买、发消息（Muse 目前只在美国、加拿大）</a:t>
+                        <a:t>手机上帮你办生活上的事（Muse 能订、买、发消息，目前只在美国、加拿大）</a:t>
                       </a:r>
                       <a:endParaRPr lang="en-US" sz="1300" dirty="0">
                         <a:latin typeface="Microsoft YaHei" charset="0"/>
@@ -19545,12 +19545,12 @@
         </p:nvSpPr>
         <p:spPr>
           <a:xfrm>
-            <a:off x="548640" y="1280160"/>
-            <a:ext cx="5394960" cy="3337560"/>
+            <a:off x="548640" y="1234440"/>
+            <a:ext cx="5806440" cy="3429000"/>
           </a:xfrm>
           <a:prstGeom prst="roundRect">
             <a:avLst>
-              <a:gd name="adj" fmla="val 2192"/>
+              <a:gd name="adj" fmla="val 2133"/>
             </a:avLst>
           </a:prstGeom>
           <a:solidFill>
@@ -19572,8 +19572,8 @@
         </p:nvSpPr>
         <p:spPr>
           <a:xfrm>
-            <a:off x="566928" y="1591056"/>
-            <a:ext cx="5358384" cy="9144"/>
+            <a:off x="566928" y="1545336"/>
+            <a:ext cx="5769864" cy="9144"/>
           </a:xfrm>
           <a:prstGeom prst="rect">
             <a:avLst/>
@@ -19597,7 +19597,7 @@
         </p:nvSpPr>
         <p:spPr>
           <a:xfrm>
-            <a:off x="694944" y="1389888"/>
+            <a:off x="694944" y="1344168"/>
             <a:ext cx="100584" cy="100584"/>
           </a:xfrm>
           <a:prstGeom prst="ellipse">
@@ -19622,7 +19622,7 @@
         </p:nvSpPr>
         <p:spPr>
           <a:xfrm>
-            <a:off x="850392" y="1389888"/>
+            <a:off x="850392" y="1344168"/>
             <a:ext cx="100584" cy="100584"/>
           </a:xfrm>
           <a:prstGeom prst="ellipse">
@@ -19647,7 +19647,7 @@
         </p:nvSpPr>
         <p:spPr>
           <a:xfrm>
-            <a:off x="1005840" y="1389888"/>
+            <a:off x="1005840" y="1344168"/>
             <a:ext cx="100584" cy="100584"/>
           </a:xfrm>
           <a:prstGeom prst="ellipse">
@@ -19672,8 +19672,8 @@
         </p:nvSpPr>
         <p:spPr>
           <a:xfrm>
-            <a:off x="1234440" y="1325880"/>
-            <a:ext cx="4572000" cy="228600"/>
+            <a:off x="1234440" y="1280160"/>
+            <a:ext cx="4983480" cy="228600"/>
           </a:xfrm>
           <a:prstGeom prst="rect">
             <a:avLst/>
@@ -19711,8 +19711,8 @@
         </p:nvSpPr>
         <p:spPr>
           <a:xfrm>
-            <a:off x="749808" y="1737360"/>
-            <a:ext cx="274320" cy="429768"/>
+            <a:off x="749808" y="1691640"/>
+            <a:ext cx="274320" cy="472440"/>
           </a:xfrm>
           <a:prstGeom prst="rect">
             <a:avLst/>
@@ -19750,8 +19750,8 @@
         </p:nvSpPr>
         <p:spPr>
           <a:xfrm>
-            <a:off x="1069848" y="1737360"/>
-            <a:ext cx="4672584" cy="429768"/>
+            <a:off x="1069848" y="1691640"/>
+            <a:ext cx="5084064" cy="472440"/>
           </a:xfrm>
           <a:prstGeom prst="rect">
             <a:avLst/>
@@ -19767,7 +19767,7 @@
               <a:buNone/>
             </a:pPr>
             <a:r>
-              <a:rPr lang="en-US" sz="1100" dirty="0">
+              <a:rPr lang="en-US" sz="1250" dirty="0">
                 <a:solidFill>
                   <a:srgbClr val="E6E9ED"/>
                 </a:solidFill>
@@ -19777,7 +19777,7 @@
               </a:rPr>
               <a:t>不要假设我清楚自己想要什么。目标不清楚时，先停下来问我，不要急着给答案。</a:t>
             </a:r>
-            <a:endParaRPr lang="en-US" sz="1100" dirty="0"/>
+            <a:endParaRPr lang="en-US" sz="1250" dirty="0"/>
           </a:p>
         </p:txBody>
       </p:sp>
@@ -19789,8 +19789,8 @@
         </p:nvSpPr>
         <p:spPr>
           <a:xfrm>
-            <a:off x="749808" y="2167128"/>
-            <a:ext cx="274320" cy="429768"/>
+            <a:off x="749808" y="2164080"/>
+            <a:ext cx="274320" cy="472440"/>
           </a:xfrm>
           <a:prstGeom prst="rect">
             <a:avLst/>
@@ -19828,8 +19828,8 @@
         </p:nvSpPr>
         <p:spPr>
           <a:xfrm>
-            <a:off x="1069848" y="2167128"/>
-            <a:ext cx="4672584" cy="429768"/>
+            <a:off x="1069848" y="2164080"/>
+            <a:ext cx="5084064" cy="472440"/>
           </a:xfrm>
           <a:prstGeom prst="rect">
             <a:avLst/>
@@ -19845,7 +19845,7 @@
               <a:buNone/>
             </a:pPr>
             <a:r>
-              <a:rPr lang="en-US" sz="1100" dirty="0">
+              <a:rPr lang="en-US" sz="1250" dirty="0">
                 <a:solidFill>
                   <a:srgbClr val="E6E9ED"/>
                 </a:solidFill>
@@ -19855,7 +19855,7 @@
               </a:rPr>
               <a:t>目标清楚但做法不是最快的，直接告诉我更好的办法。</a:t>
             </a:r>
-            <a:endParaRPr lang="en-US" sz="1100" dirty="0"/>
+            <a:endParaRPr lang="en-US" sz="1250" dirty="0"/>
           </a:p>
         </p:txBody>
       </p:sp>
@@ -19867,8 +19867,8 @@
         </p:nvSpPr>
         <p:spPr>
           <a:xfrm>
-            <a:off x="749808" y="2596896"/>
-            <a:ext cx="274320" cy="429768"/>
+            <a:off x="749808" y="2636520"/>
+            <a:ext cx="274320" cy="472440"/>
           </a:xfrm>
           <a:prstGeom prst="rect">
             <a:avLst/>
@@ -19906,8 +19906,8 @@
         </p:nvSpPr>
         <p:spPr>
           <a:xfrm>
-            <a:off x="1069848" y="2596896"/>
-            <a:ext cx="4672584" cy="429768"/>
+            <a:off x="1069848" y="2636520"/>
+            <a:ext cx="5084064" cy="472440"/>
           </a:xfrm>
           <a:prstGeom prst="rect">
             <a:avLst/>
@@ -19923,7 +19923,7 @@
               <a:buNone/>
             </a:pPr>
             <a:r>
-              <a:rPr lang="en-US" sz="1100" dirty="0">
+              <a:rPr lang="en-US" sz="1250" dirty="0">
                 <a:solidFill>
                   <a:srgbClr val="E6E9ED"/>
                 </a:solidFill>
@@ -19933,7 +19933,7 @@
               </a:rPr>
               <a:t>遇到问题找根本原因，不要只给临时补救。每个建议都要说清楚为什么。</a:t>
             </a:r>
-            <a:endParaRPr lang="en-US" sz="1100" dirty="0"/>
+            <a:endParaRPr lang="en-US" sz="1250" dirty="0"/>
           </a:p>
         </p:txBody>
       </p:sp>
@@ -19945,8 +19945,8 @@
         </p:nvSpPr>
         <p:spPr>
           <a:xfrm>
-            <a:off x="749808" y="3026664"/>
-            <a:ext cx="274320" cy="429768"/>
+            <a:off x="749808" y="3108960"/>
+            <a:ext cx="274320" cy="472440"/>
           </a:xfrm>
           <a:prstGeom prst="rect">
             <a:avLst/>
@@ -19984,8 +19984,8 @@
         </p:nvSpPr>
         <p:spPr>
           <a:xfrm>
-            <a:off x="1069848" y="3026664"/>
-            <a:ext cx="4672584" cy="429768"/>
+            <a:off x="1069848" y="3108960"/>
+            <a:ext cx="5084064" cy="472440"/>
           </a:xfrm>
           <a:prstGeom prst="rect">
             <a:avLst/>
@@ -20001,7 +20001,7 @@
               <a:buNone/>
             </a:pPr>
             <a:r>
-              <a:rPr lang="en-US" sz="1100" dirty="0">
+              <a:rPr lang="en-US" sz="1250" dirty="0">
                 <a:solidFill>
                   <a:srgbClr val="E6E9ED"/>
                 </a:solidFill>
@@ -20011,7 +20011,7 @@
               </a:rPr>
               <a:t>只说重点，删掉一切不影响我做决定的内容。</a:t>
             </a:r>
-            <a:endParaRPr lang="en-US" sz="1100" dirty="0"/>
+            <a:endParaRPr lang="en-US" sz="1250" dirty="0"/>
           </a:p>
         </p:txBody>
       </p:sp>
@@ -20023,8 +20023,8 @@
         </p:nvSpPr>
         <p:spPr>
           <a:xfrm>
-            <a:off x="749808" y="3456432"/>
-            <a:ext cx="274320" cy="429768"/>
+            <a:off x="749808" y="3581400"/>
+            <a:ext cx="274320" cy="472440"/>
           </a:xfrm>
           <a:prstGeom prst="rect">
             <a:avLst/>
@@ -20062,8 +20062,8 @@
         </p:nvSpPr>
         <p:spPr>
           <a:xfrm>
-            <a:off x="1069848" y="3456432"/>
-            <a:ext cx="4672584" cy="429768"/>
+            <a:off x="1069848" y="3581400"/>
+            <a:ext cx="5084064" cy="472440"/>
           </a:xfrm>
           <a:prstGeom prst="rect">
             <a:avLst/>
@@ -20079,7 +20079,7 @@
               <a:buNone/>
             </a:pPr>
             <a:r>
-              <a:rPr lang="en-US" sz="1100" dirty="0">
+              <a:rPr lang="en-US" sz="1250" dirty="0">
                 <a:solidFill>
                   <a:srgbClr val="E6E9ED"/>
                 </a:solidFill>
@@ -20089,7 +20089,7 @@
               </a:rPr>
               <a:t>按第一性原理思考，可以有依据地质疑我的判断，不要盲从、不要奉承。</a:t>
             </a:r>
-            <a:endParaRPr lang="en-US" sz="1100" dirty="0"/>
+            <a:endParaRPr lang="en-US" sz="1250" dirty="0"/>
           </a:p>
         </p:txBody>
       </p:sp>
@@ -20101,8 +20101,8 @@
         </p:nvSpPr>
         <p:spPr>
           <a:xfrm>
-            <a:off x="749808" y="3886200"/>
-            <a:ext cx="274320" cy="429768"/>
+            <a:off x="749808" y="4053840"/>
+            <a:ext cx="274320" cy="472440"/>
           </a:xfrm>
           <a:prstGeom prst="rect">
             <a:avLst/>
@@ -20140,8 +20140,8 @@
         </p:nvSpPr>
         <p:spPr>
           <a:xfrm>
-            <a:off x="1069848" y="3886200"/>
-            <a:ext cx="4672584" cy="429768"/>
+            <a:off x="1069848" y="4053840"/>
+            <a:ext cx="5084064" cy="472440"/>
           </a:xfrm>
           <a:prstGeom prst="rect">
             <a:avLst/>
@@ -20157,7 +20157,7 @@
               <a:buNone/>
             </a:pPr>
             <a:r>
-              <a:rPr lang="en-US" sz="1100" dirty="0">
+              <a:rPr lang="en-US" sz="1250" dirty="0">
                 <a:solidFill>
                   <a:srgbClr val="E6E9ED"/>
                 </a:solidFill>
@@ -20167,7 +20167,7 @@
               </a:rPr>
               <a:t>每个回答先自己挑一遍毛病，确认没问题再给我。</a:t>
             </a:r>
-            <a:endParaRPr lang="en-US" sz="1100" dirty="0"/>
+            <a:endParaRPr lang="en-US" sz="1250" dirty="0"/>
           </a:p>
         </p:txBody>
       </p:sp>
@@ -20179,8 +20179,8 @@
         </p:nvSpPr>
         <p:spPr>
           <a:xfrm>
-            <a:off x="6172200" y="1280160"/>
-            <a:ext cx="2423160" cy="1600200"/>
+            <a:off x="6537960" y="1234440"/>
+            <a:ext cx="2057400" cy="1600200"/>
           </a:xfrm>
           <a:prstGeom prst="roundRect">
             <a:avLst>
@@ -20206,8 +20206,8 @@
         </p:nvSpPr>
         <p:spPr>
           <a:xfrm>
-            <a:off x="6355080" y="1444752"/>
-            <a:ext cx="2103120" cy="365760"/>
+            <a:off x="6675120" y="1399032"/>
+            <a:ext cx="1828800" cy="365760"/>
           </a:xfrm>
           <a:prstGeom prst="rect">
             <a:avLst/>
@@ -20223,7 +20223,7 @@
               <a:buNone/>
             </a:pPr>
             <a:r>
-              <a:rPr lang="en-US" sz="1500" b="1" dirty="0">
+              <a:rPr lang="en-US" sz="1400" b="1" dirty="0">
                 <a:solidFill>
                   <a:schemeClr val="accent2"/>
                 </a:solidFill>
@@ -20233,7 +20233,7 @@
               </a:rPr>
               <a:t>贴到 Codex 指令</a:t>
             </a:r>
-            <a:endParaRPr lang="en-US" sz="1500" dirty="0"/>
+            <a:endParaRPr lang="en-US" sz="1400" dirty="0"/>
           </a:p>
         </p:txBody>
       </p:sp>
@@ -20245,8 +20245,8 @@
         </p:nvSpPr>
         <p:spPr>
           <a:xfrm>
-            <a:off x="6355080" y="1874520"/>
-            <a:ext cx="2103120" cy="914400"/>
+            <a:off x="6675120" y="1828800"/>
+            <a:ext cx="1828800" cy="914400"/>
           </a:xfrm>
           <a:prstGeom prst="rect">
             <a:avLst/>
@@ -20262,7 +20262,7 @@
               <a:buNone/>
             </a:pPr>
             <a:r>
-              <a:rPr lang="en-US" sz="1300" dirty="0">
+              <a:rPr lang="en-US" sz="1200" dirty="0">
                 <a:solidFill>
                   <a:schemeClr val="tx1"/>
                 </a:solidFill>
@@ -20270,9 +20270,43 @@
                 <a:ea typeface="Microsoft YaHei" pitchFamily="34" charset="-122"/>
                 <a:cs typeface="Microsoft YaHei" pitchFamily="34" charset="-120"/>
               </a:rPr>
-              <a:t>设置 → 个性化 → 自定义指令 →「Codex 指令」</a:t>
-            </a:r>
-            <a:endParaRPr lang="en-US" sz="1300" dirty="0"/>
+              <a:t>设置 → 个性化</a:t>
+            </a:r>
+            <a:endParaRPr lang="en-US" sz="1200" dirty="0"/>
+          </a:p>
+          <a:p>
+            <a:pPr indent="0" marL="0">
+              <a:buNone/>
+            </a:pPr>
+            <a:r>
+              <a:rPr lang="en-US" sz="1200" dirty="0">
+                <a:solidFill>
+                  <a:schemeClr val="tx1"/>
+                </a:solidFill>
+                <a:latin typeface="Microsoft YaHei" pitchFamily="34" charset="0"/>
+                <a:ea typeface="Microsoft YaHei" pitchFamily="34" charset="-122"/>
+                <a:cs typeface="Microsoft YaHei" pitchFamily="34" charset="-120"/>
+              </a:rPr>
+              <a:t>→ 自定义指令</a:t>
+            </a:r>
+            <a:endParaRPr lang="en-US" sz="1200" dirty="0"/>
+          </a:p>
+          <a:p>
+            <a:pPr indent="0" marL="0">
+              <a:buNone/>
+            </a:pPr>
+            <a:r>
+              <a:rPr lang="en-US" sz="1200" dirty="0">
+                <a:solidFill>
+                  <a:schemeClr val="tx1"/>
+                </a:solidFill>
+                <a:latin typeface="Microsoft YaHei" pitchFamily="34" charset="0"/>
+                <a:ea typeface="Microsoft YaHei" pitchFamily="34" charset="-122"/>
+                <a:cs typeface="Microsoft YaHei" pitchFamily="34" charset="-120"/>
+              </a:rPr>
+              <a:t>→「Codex 指令」</a:t>
+            </a:r>
+            <a:endParaRPr lang="en-US" sz="1200" dirty="0"/>
           </a:p>
         </p:txBody>
       </p:sp>
@@ -20284,8 +20318,8 @@
         </p:nvSpPr>
         <p:spPr>
           <a:xfrm>
-            <a:off x="6172200" y="3017520"/>
-            <a:ext cx="2423160" cy="1600200"/>
+            <a:off x="6537960" y="3063240"/>
+            <a:ext cx="2057400" cy="1600200"/>
           </a:xfrm>
           <a:prstGeom prst="roundRect">
             <a:avLst>
@@ -20311,8 +20345,8 @@
         </p:nvSpPr>
         <p:spPr>
           <a:xfrm>
-            <a:off x="6355080" y="3182112"/>
-            <a:ext cx="2103120" cy="365760"/>
+            <a:off x="6675120" y="3227832"/>
+            <a:ext cx="1828800" cy="365760"/>
           </a:xfrm>
           <a:prstGeom prst="rect">
             <a:avLst/>
@@ -20328,7 +20362,7 @@
               <a:buNone/>
             </a:pPr>
             <a:r>
-              <a:rPr lang="en-US" sz="1500" b="1" dirty="0">
+              <a:rPr lang="en-US" sz="1400" b="1" dirty="0">
                 <a:solidFill>
                   <a:schemeClr val="accent2"/>
                 </a:solidFill>
@@ -20338,7 +20372,7 @@
               </a:rPr>
               <a:t>贴到 文件夹</a:t>
             </a:r>
-            <a:endParaRPr lang="en-US" sz="1500" dirty="0"/>
+            <a:endParaRPr lang="en-US" sz="1400" dirty="0"/>
           </a:p>
         </p:txBody>
       </p:sp>
@@ -20350,8 +20384,8 @@
         </p:nvSpPr>
         <p:spPr>
           <a:xfrm>
-            <a:off x="6355080" y="3611880"/>
-            <a:ext cx="2103120" cy="914400"/>
+            <a:off x="6675120" y="3657600"/>
+            <a:ext cx="1828800" cy="914400"/>
           </a:xfrm>
           <a:prstGeom prst="rect">
             <a:avLst/>
@@ -20367,7 +20401,7 @@
               <a:buNone/>
             </a:pPr>
             <a:r>
-              <a:rPr lang="en-US" sz="1300" dirty="0">
+              <a:rPr lang="en-US" sz="1200" dirty="0">
                 <a:solidFill>
                   <a:schemeClr val="tx1"/>
                 </a:solidFill>
@@ -20377,7 +20411,7 @@
               </a:rPr>
               <a:t>也可以在文件夹里放一个 AGENTS.md 文件</a:t>
             </a:r>
-            <a:endParaRPr lang="en-US" sz="1300" dirty="0"/>
+            <a:endParaRPr lang="en-US" sz="1200" dirty="0"/>
           </a:p>
         </p:txBody>
       </p:sp>
@@ -20612,7 +20646,7 @@
                 <a:ea typeface="Microsoft YaHei" pitchFamily="34" charset="-122"/>
                 <a:cs typeface="Microsoft YaHei" pitchFamily="34" charset="-120"/>
               </a:rPr>
-              <a:t>先看现成的：左边「插件」页，有「插件」和「技能」两栏，右上角「添加」</a:t>
+              <a:t>先看现成的：左边「插件」页，有「插件」和「技能」两栏，要用的点「+」</a:t>
             </a:r>
             <a:endParaRPr lang="en-US" sz="1600" dirty="0"/>
           </a:p>
@@ -22473,7 +22507,7 @@
                   <a:schemeClr val="tx1"/>
                 </a:solidFill>
               </a:rPr>
-              <a:t>让它用你电脑上的软件</a:t>
+              <a:t>让它用你电脑上的软件（设置 → 电脑操控）</a:t>
             </a:r>
             <a:endParaRPr lang="en-US" sz="2600" dirty="0"/>
           </a:p>
@@ -23538,7 +23572,7 @@
                 <a:ea typeface="Microsoft YaHei" pitchFamily="34" charset="-122"/>
                 <a:cs typeface="Microsoft YaHei" pitchFamily="34" charset="-120"/>
               </a:rPr>
-              <a:t>关掉「用你的数据训练模型」：设置 →「数据管理」</a:t>
+              <a:t>在设置 →「数据管理」里，关掉用你的数据训练模型的开关</a:t>
             </a:r>
             <a:endParaRPr lang="en-US" sz="1600" dirty="0"/>
           </a:p>
@@ -24038,7 +24072,7 @@
                   <a:schemeClr val="accent5"/>
                 </a:solidFill>
               </a:rPr>
-              <a:t>排计划 · 邮箱 · 每日汇总 · 客户档案 · 业务报告 · 知识库</a:t>
+              <a:t>排计划 · 邮箱 · 汇总 · 客户 · 报告 · 知识库</a:t>
             </a:r>
             <a:endParaRPr lang="en-US" sz="1600" dirty="0"/>
           </a:p>
@@ -25485,7 +25519,7 @@
               <a:buNone/>
             </a:pPr>
             <a:r>
-              <a:rPr lang="en-US" sz="1200" b="1" dirty="0">
+              <a:rPr lang="en-US" sz="1300" b="1" dirty="0">
                 <a:solidFill>
                   <a:schemeClr val="tx1"/>
                 </a:solidFill>
@@ -25495,7 +25529,7 @@
               </a:rPr>
               <a:t>它排的是建议，最后由你拍板</a:t>
             </a:r>
-            <a:endParaRPr lang="en-US" sz="1200" dirty="0"/>
+            <a:endParaRPr lang="en-US" sz="1300" dirty="0"/>
           </a:p>
         </p:txBody>
       </p:sp>
@@ -27087,7 +27121,7 @@
               <a:buNone/>
             </a:pPr>
             <a:r>
-              <a:rPr lang="en-US" sz="1200" b="1" dirty="0">
+              <a:rPr lang="en-US" sz="1300" b="1" dirty="0">
                 <a:solidFill>
                   <a:schemeClr val="tx1"/>
                 </a:solidFill>
@@ -27097,7 +27131,7 @@
               </a:rPr>
               <a:t>只让它读和整理，不让它删邮件</a:t>
             </a:r>
-            <a:endParaRPr lang="en-US" sz="1200" dirty="0"/>
+            <a:endParaRPr lang="en-US" sz="1300" dirty="0"/>
           </a:p>
         </p:txBody>
       </p:sp>
@@ -27966,7 +28000,7 @@
               <a:buNone/>
             </a:pPr>
             <a:r>
-              <a:rPr lang="en-US" sz="1200" b="1" dirty="0">
+              <a:rPr lang="en-US" sz="1300" b="1" dirty="0">
                 <a:solidFill>
                   <a:schemeClr val="tx1"/>
                 </a:solidFill>
@@ -27976,7 +28010,7 @@
               </a:rPr>
               <a:t>全自动发送，属于企业自动化，后面会讲</a:t>
             </a:r>
-            <a:endParaRPr lang="en-US" sz="1200" dirty="0"/>
+            <a:endParaRPr lang="en-US" sz="1300" dirty="0"/>
           </a:p>
         </p:txBody>
       </p:sp>
@@ -28511,9 +28545,9 @@
               <a:buNone/>
             </a:pPr>
             <a:r>
-              <a:rPr lang="en-US" sz="1200" dirty="0">
-                <a:solidFill>
-                  <a:schemeClr val="tx2"/>
+              <a:rPr lang="en-US" sz="1300" dirty="0">
+                <a:solidFill>
+                  <a:schemeClr val="tx1"/>
                 </a:solidFill>
                 <a:latin typeface="Microsoft YaHei" pitchFamily="34" charset="0"/>
                 <a:ea typeface="Microsoft YaHei" pitchFamily="34" charset="-122"/>
@@ -28521,7 +28555,7 @@
               </a:rPr>
               <a:t>所以：只让它起草不让它发送；它突然要做奇怪的事，看清楚确认提示再点。</a:t>
             </a:r>
-            <a:endParaRPr lang="en-US" sz="1200" dirty="0"/>
+            <a:endParaRPr lang="en-US" sz="1300" dirty="0"/>
           </a:p>
         </p:txBody>
       </p:sp>
@@ -29779,9 +29813,9 @@
               <a:buNone/>
             </a:pPr>
             <a:r>
-              <a:rPr lang="en-US" sz="1200" dirty="0">
-                <a:solidFill>
-                  <a:schemeClr val="tx2"/>
+              <a:rPr lang="en-US" sz="1300" dirty="0">
+                <a:solidFill>
+                  <a:schemeClr val="tx1"/>
                 </a:solidFill>
                 <a:latin typeface="Microsoft YaHei" pitchFamily="34" charset="0"/>
                 <a:ea typeface="Microsoft YaHei" pitchFamily="34" charset="-122"/>
@@ -29789,7 +29823,7 @@
               </a:rPr>
               <a:t>每天早上：读日历和邮件，列出今天的日程、要回的邮件、三件最重要的事。</a:t>
             </a:r>
-            <a:endParaRPr lang="en-US" sz="1200" dirty="0"/>
+            <a:endParaRPr lang="en-US" sz="1300" dirty="0"/>
           </a:p>
         </p:txBody>
       </p:sp>
@@ -31701,7 +31735,7 @@
                 <a:ea typeface="Microsoft YaHei" pitchFamily="34" charset="-122"/>
                 <a:cs typeface="Microsoft YaHei" pitchFamily="34" charset="-120"/>
               </a:rPr>
-              <a:t>关机或睡眠时错过的不会补跑。打开「使此电脑保持唤醒」，插着电就不会睡着</a:t>
+              <a:t>关机或睡眠时错过的不会补跑。设置 →「连接」→「使此电脑保持唤醒」，插着电就不会睡着</a:t>
             </a:r>
             <a:endParaRPr lang="en-US" sz="1600" dirty="0"/>
           </a:p>
@@ -34497,7 +34531,7 @@
                 <a:ea typeface="Microsoft YaHei" pitchFamily="34" charset="-122"/>
                 <a:cs typeface="Microsoft YaHei" pitchFamily="34" charset="-120"/>
               </a:rPr>
-              <a:t>先删掉姓名、电话、身份证号</a:t>
+              <a:t>把姓名、电话换成客户代号（C001…），对照表留在自己电脑</a:t>
             </a:r>
             <a:endParaRPr lang="en-US" sz="1500" dirty="0"/>
           </a:p>
@@ -35002,7 +35036,7 @@
               <a:buNone/>
             </a:pPr>
             <a:r>
-              <a:rPr lang="en-US" sz="1200" b="1" dirty="0">
+              <a:rPr lang="en-US" sz="1300" b="1" dirty="0">
                 <a:solidFill>
                   <a:schemeClr val="tx1"/>
                 </a:solidFill>
@@ -35012,7 +35046,7 @@
               </a:rPr>
               <a:t>整理完，原始记录不要删，留着核对</a:t>
             </a:r>
-            <a:endParaRPr lang="en-US" sz="1200" dirty="0"/>
+            <a:endParaRPr lang="en-US" sz="1300" dirty="0"/>
           </a:p>
         </p:txBody>
       </p:sp>
@@ -35881,7 +35915,7 @@
               <a:buNone/>
             </a:pPr>
             <a:r>
-              <a:rPr lang="en-US" sz="1200" b="1" dirty="0">
+              <a:rPr lang="en-US" sz="1300" b="1" dirty="0">
                 <a:solidFill>
                   <a:schemeClr val="tx1"/>
                 </a:solidFill>
@@ -35891,7 +35925,7 @@
               </a:rPr>
               <a:t>建议由你决定做不做；数字挑几条回原表核对</a:t>
             </a:r>
-            <a:endParaRPr lang="en-US" sz="1200" dirty="0"/>
+            <a:endParaRPr lang="en-US" sz="1300" dirty="0"/>
           </a:p>
         </p:txBody>
       </p:sp>
@@ -38416,7 +38450,7 @@
               <a:buNone/>
             </a:pPr>
             <a:r>
-              <a:rPr lang="en-US" sz="1200" b="1" dirty="0">
+              <a:rPr lang="en-US" sz="1300" b="1" dirty="0">
                 <a:solidFill>
                   <a:schemeClr val="tx1"/>
                 </a:solidFill>
@@ -38426,7 +38460,7 @@
               </a:rPr>
               <a:t>报告里的数字，挑一两个回原表核对</a:t>
             </a:r>
-            <a:endParaRPr lang="en-US" sz="1200" dirty="0"/>
+            <a:endParaRPr lang="en-US" sz="1300" dirty="0"/>
           </a:p>
         </p:txBody>
       </p:sp>
@@ -39684,9 +39718,9 @@
               <a:buNone/>
             </a:pPr>
             <a:r>
-              <a:rPr lang="en-US" sz="1200" dirty="0">
-                <a:solidFill>
-                  <a:schemeClr val="tx2"/>
+              <a:rPr lang="en-US" sz="1300" dirty="0">
+                <a:solidFill>
+                  <a:schemeClr val="tx1"/>
                 </a:solidFill>
                 <a:latin typeface="Microsoft YaHei" pitchFamily="34" charset="0"/>
                 <a:ea typeface="Microsoft YaHei" pitchFamily="34" charset="-122"/>
@@ -39694,7 +39728,7 @@
               </a:rPr>
               <a:t>「客人问周末营业吗？」它从「营业时间」那份文件里找答案，并告诉你出自哪份文件。</a:t>
             </a:r>
-            <a:endParaRPr lang="en-US" sz="1200" dirty="0"/>
+            <a:endParaRPr lang="en-US" sz="1300" dirty="0"/>
           </a:p>
         </p:txBody>
       </p:sp>
@@ -43160,11 +43194,11 @@
             </a:avLst>
           </a:prstGeom>
           <a:solidFill>
-            <a:srgbClr val="C8F031"/>
+            <a:srgbClr val="FDEBE3"/>
           </a:solidFill>
           <a:ln w="12700">
             <a:solidFill>
-              <a:srgbClr val="C8F031"/>
+              <a:srgbClr val="FDEBE3"/>
             </a:solidFill>
             <a:prstDash val="solid"/>
           </a:ln>
@@ -43250,11 +43284,11 @@
             </a:avLst>
           </a:prstGeom>
           <a:solidFill>
-            <a:srgbClr val="C8F031"/>
+            <a:srgbClr val="FDEBE3"/>
           </a:solidFill>
           <a:ln w="12700">
             <a:solidFill>
-              <a:srgbClr val="C8F031"/>
+              <a:srgbClr val="FDEBE3"/>
             </a:solidFill>
             <a:prstDash val="solid"/>
           </a:ln>
@@ -43340,11 +43374,11 @@
             </a:avLst>
           </a:prstGeom>
           <a:solidFill>
-            <a:srgbClr val="C8F031"/>
+            <a:srgbClr val="FDEBE3"/>
           </a:solidFill>
           <a:ln w="12700">
             <a:solidFill>
-              <a:srgbClr val="C8F031"/>
+              <a:srgbClr val="FDEBE3"/>
             </a:solidFill>
             <a:prstDash val="solid"/>
           </a:ln>
@@ -43430,11 +43464,11 @@
             </a:avLst>
           </a:prstGeom>
           <a:solidFill>
-            <a:srgbClr val="C8F031"/>
+            <a:srgbClr val="FDEBE3"/>
           </a:solidFill>
           <a:ln w="12700">
             <a:solidFill>
-              <a:srgbClr val="C8F031"/>
+              <a:srgbClr val="FDEBE3"/>
             </a:solidFill>
             <a:prstDash val="solid"/>
           </a:ln>
@@ -43520,11 +43554,11 @@
             </a:avLst>
           </a:prstGeom>
           <a:solidFill>
-            <a:srgbClr val="C8F031"/>
+            <a:srgbClr val="FDEBE3"/>
           </a:solidFill>
           <a:ln w="12700">
             <a:solidFill>
-              <a:srgbClr val="C8F031"/>
+              <a:srgbClr val="FDEBE3"/>
             </a:solidFill>
             <a:prstDash val="solid"/>
           </a:ln>
@@ -43749,11 +43783,11 @@
         <p:spPr>
           <a:xfrm>
             <a:off x="548640" y="1188720"/>
-            <a:ext cx="8046720" cy="3063240"/>
+            <a:ext cx="8046720" cy="2926080"/>
           </a:xfrm>
           <a:prstGeom prst="roundRect">
             <a:avLst>
-              <a:gd name="adj" fmla="val 2388"/>
+              <a:gd name="adj" fmla="val 2500"/>
             </a:avLst>
           </a:prstGeom>
           <a:solidFill>
@@ -43915,7 +43949,7 @@
         <p:spPr>
           <a:xfrm>
             <a:off x="749808" y="1600200"/>
-            <a:ext cx="7644384" cy="2468880"/>
+            <a:ext cx="7644384" cy="2331720"/>
           </a:xfrm>
           <a:prstGeom prst="rect">
             <a:avLst/>
@@ -43931,7 +43965,7 @@
               <a:buNone/>
             </a:pPr>
             <a:r>
-              <a:rPr lang="en-US" sz="1300" dirty="0">
+              <a:rPr lang="en-US" sz="1250" dirty="0">
                 <a:solidFill>
                   <a:srgbClr val="FFFFFF"/>
                 </a:solidFill>
@@ -43941,14 +43975,14 @@
               </a:rPr>
               <a:t>帮我做一个网页小工具：【工具名】。</a:t>
             </a:r>
-            <a:endParaRPr lang="en-US" sz="1300" dirty="0"/>
+            <a:endParaRPr lang="en-US" sz="1250" dirty="0"/>
           </a:p>
           <a:p>
             <a:pPr indent="0" marL="0">
               <a:buNone/>
             </a:pPr>
             <a:r>
-              <a:rPr lang="en-US" sz="1300" dirty="0">
+              <a:rPr lang="en-US" sz="1250" dirty="0">
                 <a:solidFill>
                   <a:srgbClr val="FFFFFF"/>
                 </a:solidFill>
@@ -43958,14 +43992,14 @@
               </a:rPr>
               <a:t>谁用：【我 / 店员】，在【电脑 / 手机】上用。</a:t>
             </a:r>
-            <a:endParaRPr lang="en-US" sz="1300" dirty="0"/>
+            <a:endParaRPr lang="en-US" sz="1250" dirty="0"/>
           </a:p>
           <a:p>
             <a:pPr indent="0" marL="0">
               <a:buNone/>
             </a:pPr>
             <a:r>
-              <a:rPr lang="en-US" sz="1300" dirty="0">
+              <a:rPr lang="en-US" sz="1250" dirty="0">
                 <a:solidFill>
                   <a:srgbClr val="FFFFFF"/>
                 </a:solidFill>
@@ -43975,14 +44009,14 @@
               </a:rPr>
               <a:t>它要做：输入【什么】，得到【什么】。</a:t>
             </a:r>
-            <a:endParaRPr lang="en-US" sz="1300" dirty="0"/>
+            <a:endParaRPr lang="en-US" sz="1250" dirty="0"/>
           </a:p>
           <a:p>
             <a:pPr indent="0" marL="0">
               <a:buNone/>
             </a:pPr>
             <a:r>
-              <a:rPr lang="en-US" sz="1300" dirty="0">
+              <a:rPr lang="en-US" sz="1250" dirty="0">
                 <a:solidFill>
                   <a:srgbClr val="FFFFFF"/>
                 </a:solidFill>
@@ -43992,14 +44026,14 @@
               </a:rPr>
               <a:t> </a:t>
             </a:r>
-            <a:endParaRPr lang="en-US" sz="1300" dirty="0"/>
+            <a:endParaRPr lang="en-US" sz="1250" dirty="0"/>
           </a:p>
           <a:p>
             <a:pPr indent="0" marL="0">
               <a:buNone/>
             </a:pPr>
             <a:r>
-              <a:rPr lang="en-US" sz="1300" dirty="0">
+              <a:rPr lang="en-US" sz="1250" dirty="0">
                 <a:solidFill>
                   <a:srgbClr val="FFFFFF"/>
                 </a:solidFill>
@@ -44009,14 +44043,14 @@
               </a:rPr>
               <a:t>要求：</a:t>
             </a:r>
-            <a:endParaRPr lang="en-US" sz="1300" dirty="0"/>
+            <a:endParaRPr lang="en-US" sz="1250" dirty="0"/>
           </a:p>
           <a:p>
             <a:pPr indent="0" marL="0">
               <a:buNone/>
             </a:pPr>
             <a:r>
-              <a:rPr lang="en-US" sz="1300" dirty="0">
+              <a:rPr lang="en-US" sz="1250" dirty="0">
                 <a:solidFill>
                   <a:srgbClr val="C9CED6"/>
                 </a:solidFill>
@@ -44026,14 +44060,14 @@
               </a:rPr>
               <a:t>1. 只做一个 .html 文件，双击就能打开，不用安装任何东西</a:t>
             </a:r>
-            <a:endParaRPr lang="en-US" sz="1300" dirty="0"/>
+            <a:endParaRPr lang="en-US" sz="1250" dirty="0"/>
           </a:p>
           <a:p>
             <a:pPr indent="0" marL="0">
               <a:buNone/>
             </a:pPr>
             <a:r>
-              <a:rPr lang="en-US" sz="1300" dirty="0">
+              <a:rPr lang="en-US" sz="1250" dirty="0">
                 <a:solidFill>
                   <a:srgbClr val="C9CED6"/>
                 </a:solidFill>
@@ -44043,14 +44077,14 @@
               </a:rPr>
               <a:t>2. 不用 React 这类框架，所有代码写在这一个文件里</a:t>
             </a:r>
-            <a:endParaRPr lang="en-US" sz="1300" dirty="0"/>
+            <a:endParaRPr lang="en-US" sz="1250" dirty="0"/>
           </a:p>
           <a:p>
             <a:pPr indent="0" marL="0">
               <a:buNone/>
             </a:pPr>
             <a:r>
-              <a:rPr lang="en-US" sz="1300" dirty="0">
+              <a:rPr lang="en-US" sz="1250" dirty="0">
                 <a:solidFill>
                   <a:srgbClr val="C9CED6"/>
                 </a:solidFill>
@@ -44060,14 +44094,14 @@
               </a:rPr>
               <a:t>3. 中文界面，字和按钮要大，手机上也能用</a:t>
             </a:r>
-            <a:endParaRPr lang="en-US" sz="1300" dirty="0"/>
+            <a:endParaRPr lang="en-US" sz="1250" dirty="0"/>
           </a:p>
           <a:p>
             <a:pPr indent="0" marL="0">
               <a:buNone/>
             </a:pPr>
             <a:r>
-              <a:rPr lang="en-US" sz="1300" dirty="0">
+              <a:rPr lang="en-US" sz="1250" dirty="0">
                 <a:solidFill>
                   <a:srgbClr val="C9CED6"/>
                 </a:solidFill>
@@ -44077,14 +44111,14 @@
               </a:rPr>
               <a:t>4. 填过的内容存在浏览器里，刷新不丢</a:t>
             </a:r>
-            <a:endParaRPr lang="en-US" sz="1300" dirty="0"/>
+            <a:endParaRPr lang="en-US" sz="1250" dirty="0"/>
           </a:p>
           <a:p>
             <a:pPr indent="0" marL="0">
               <a:buNone/>
             </a:pPr>
             <a:r>
-              <a:rPr lang="en-US" sz="1300" dirty="0">
+              <a:rPr lang="en-US" sz="1250" dirty="0">
                 <a:solidFill>
                   <a:srgbClr val="C9CED6"/>
                 </a:solidFill>
@@ -44094,14 +44128,14 @@
               </a:rPr>
               <a:t>5. 结果可以一键复制</a:t>
             </a:r>
-            <a:endParaRPr lang="en-US" sz="1300" dirty="0"/>
+            <a:endParaRPr lang="en-US" sz="1250" dirty="0"/>
           </a:p>
           <a:p>
             <a:pPr indent="0" marL="0">
               <a:buNone/>
             </a:pPr>
             <a:r>
-              <a:rPr lang="en-US" sz="1300" dirty="0">
+              <a:rPr lang="en-US" sz="1250" dirty="0">
                 <a:solidFill>
                   <a:srgbClr val="FFFFFF"/>
                 </a:solidFill>
@@ -44111,14 +44145,14 @@
               </a:rPr>
               <a:t> </a:t>
             </a:r>
-            <a:endParaRPr lang="en-US" sz="1300" dirty="0"/>
+            <a:endParaRPr lang="en-US" sz="1250" dirty="0"/>
           </a:p>
           <a:p>
             <a:pPr indent="0" marL="0">
               <a:buNone/>
             </a:pPr>
             <a:r>
-              <a:rPr lang="en-US" sz="1300" b="1" dirty="0">
+              <a:rPr lang="en-US" sz="1250" b="1" dirty="0">
                 <a:solidFill>
                   <a:srgbClr val="C8F031"/>
                 </a:solidFill>
@@ -44128,7 +44162,7 @@
               </a:rPr>
               <a:t>先别写代码：先列出你打算做的功能和页面样子，等我确认再做。</a:t>
             </a:r>
-            <a:endParaRPr lang="en-US" sz="1300" dirty="0"/>
+            <a:endParaRPr lang="en-US" sz="1250" dirty="0"/>
           </a:p>
         </p:txBody>
       </p:sp>
@@ -44140,7 +44174,7 @@
         </p:nvSpPr>
         <p:spPr>
           <a:xfrm>
-            <a:off x="548640" y="4315968"/>
+            <a:off x="548640" y="4224528"/>
             <a:ext cx="8046720" cy="384048"/>
           </a:xfrm>
           <a:prstGeom prst="roundRect">
@@ -44167,7 +44201,7 @@
         </p:nvSpPr>
         <p:spPr>
           <a:xfrm>
-            <a:off x="777240" y="4315968"/>
+            <a:off x="777240" y="4224528"/>
             <a:ext cx="7589520" cy="384048"/>
           </a:xfrm>
           <a:prstGeom prst="rect">
@@ -45569,7 +45603,7 @@
                   <a:schemeClr val="tx1"/>
                 </a:solidFill>
               </a:rPr>
-              <a:t>隐私和安全（新加坡 PDPA）</a:t>
+              <a:t>隐私和安全（含新加坡 PDPA）</a:t>
             </a:r>
             <a:endParaRPr lang="en-US" sz="2600" dirty="0"/>
           </a:p>
@@ -45659,7 +45693,7 @@
                 <a:ea typeface="Microsoft YaHei" pitchFamily="34" charset="-122"/>
                 <a:cs typeface="Microsoft YaHei" pitchFamily="34" charset="-120"/>
               </a:rPr>
-              <a:t>处理客户资料前，先删掉姓名、电话、身份证号</a:t>
+              <a:t>处理客户资料前，姓名、电话换成代号，身份证号删掉</a:t>
             </a:r>
             <a:endParaRPr lang="en-US" sz="1600" dirty="0"/>
           </a:p>
@@ -45749,7 +45783,7 @@
                 <a:ea typeface="Microsoft YaHei" pitchFamily="34" charset="-122"/>
                 <a:cs typeface="Microsoft YaHei" pitchFamily="34" charset="-120"/>
               </a:rPr>
-              <a:t>关掉「用你的数据训练模型」：设置 →「数据管理」</a:t>
+              <a:t>在设置 →「数据管理」里，关掉用你的数据训练模型的开关</a:t>
             </a:r>
             <a:endParaRPr lang="en-US" sz="1600" dirty="0"/>
           </a:p>
@@ -47932,6 +47966,27 @@
                 <a:ea typeface="Microsoft YaHei" pitchFamily="34" charset="-122"/>
                 <a:cs typeface="Microsoft YaHei" pitchFamily="34" charset="-120"/>
               </a:rPr>
+              <a:t>全自动发邮件、发通知，要有审核和记录</a:t>
+            </a:r>
+            <a:endParaRPr lang="en-US" sz="1400" dirty="0"/>
+          </a:p>
+          <a:p>
+            <a:pPr marL="177800" indent="-177800">
+              <a:spcAft>
+                <a:spcPts val="600"/>
+              </a:spcAft>
+              <a:buSzPct val="100000"/>
+              <a:buChar char="•"/>
+            </a:pPr>
+            <a:r>
+              <a:rPr lang="en-US" sz="1400" dirty="0">
+                <a:solidFill>
+                  <a:schemeClr val="tx1"/>
+                </a:solidFill>
+                <a:latin typeface="Microsoft YaHei" pitchFamily="34" charset="0"/>
+                <a:ea typeface="Microsoft YaHei" pitchFamily="34" charset="-122"/>
+                <a:cs typeface="Microsoft YaHei" pitchFamily="34" charset="-120"/>
+              </a:rPr>
               <a:t>要管权限、稳定运行、保护数据</a:t>
             </a:r>
             <a:endParaRPr lang="en-US" sz="1400" dirty="0"/>
@@ -48469,9 +48524,9 @@
               <a:buNone/>
             </a:pPr>
             <a:r>
-              <a:rPr lang="en-US" sz="1200" dirty="0">
-                <a:solidFill>
-                  <a:schemeClr val="tx2"/>
+              <a:rPr lang="en-US" sz="1300" dirty="0">
+                <a:solidFill>
+                  <a:schemeClr val="tx1"/>
                 </a:solidFill>
                 <a:latin typeface="Microsoft YaHei" pitchFamily="34" charset="0"/>
                 <a:ea typeface="Microsoft YaHei" pitchFamily="34" charset="-122"/>
@@ -48479,7 +48534,7 @@
               </a:rPr>
               <a:t>下面用一个真实项目来看：一家培训机构的全流程。</a:t>
             </a:r>
-            <a:endParaRPr lang="en-US" sz="1200" dirty="0"/>
+            <a:endParaRPr lang="en-US" sz="1300" dirty="0"/>
           </a:p>
         </p:txBody>
       </p:sp>
@@ -50052,7 +50107,7 @@
                 <a:gridCol w="1877568"/>
                 <a:gridCol w="4649216"/>
               </a:tblGrid>
-              <a:tr h="405765">
+              <a:tr h="360680">
                 <a:tc>
                   <a:txBody>
                     <a:bodyPr/>
@@ -50258,7 +50313,7 @@
                   </a:tcPr>
                 </a:tc>
               </a:tr>
-              <a:tr h="405765">
+              <a:tr h="360680">
                 <a:tc>
                   <a:txBody>
                     <a:bodyPr/>
@@ -50464,7 +50519,7 @@
                   </a:tcPr>
                 </a:tc>
               </a:tr>
-              <a:tr h="405765">
+              <a:tr h="360680">
                 <a:tc>
                   <a:txBody>
                     <a:bodyPr/>
@@ -50670,7 +50725,7 @@
                   </a:tcPr>
                 </a:tc>
               </a:tr>
-              <a:tr h="405765">
+              <a:tr h="360680">
                 <a:tc>
                   <a:txBody>
                     <a:bodyPr/>
@@ -50876,7 +50931,7 @@
                   </a:tcPr>
                 </a:tc>
               </a:tr>
-              <a:tr h="405765">
+              <a:tr h="360680">
                 <a:tc>
                   <a:txBody>
                     <a:bodyPr/>
@@ -51082,7 +51137,7 @@
                   </a:tcPr>
                 </a:tc>
               </a:tr>
-              <a:tr h="405765">
+              <a:tr h="360680">
                 <a:tc>
                   <a:txBody>
                     <a:bodyPr/>
@@ -51288,7 +51343,7 @@
                   </a:tcPr>
                 </a:tc>
               </a:tr>
-              <a:tr h="405765">
+              <a:tr h="360680">
                 <a:tc>
                   <a:txBody>
                     <a:bodyPr/>
@@ -51494,7 +51549,7 @@
                   </a:tcPr>
                 </a:tc>
               </a:tr>
-              <a:tr h="405765">
+              <a:tr h="360680">
                 <a:tc>
                   <a:txBody>
                     <a:bodyPr/>
@@ -51696,6 +51751,212 @@
                     </a:lnB>
                     <a:solidFill>
                       <a:srgbClr val="FFFFFF"/>
+                    </a:solidFill>
+                  </a:tcPr>
+                </a:tc>
+              </a:tr>
+              <a:tr h="360680">
+                <a:tc>
+                  <a:txBody>
+                    <a:bodyPr/>
+                    <a:lstStyle/>
+                    <a:p>
+                      <a:pPr indent="0" marL="0">
+                        <a:buNone/>
+                      </a:pPr>
+                      <a:r>
+                        <a:rPr lang="en-US" sz="1300" b="1" dirty="0">
+                          <a:solidFill>
+                            <a:srgbClr val="16191F"/>
+                          </a:solidFill>
+                          <a:latin typeface="Microsoft YaHei" pitchFamily="34" charset="0"/>
+                          <a:ea typeface="Microsoft YaHei" pitchFamily="34" charset="-122"/>
+                          <a:cs typeface="Microsoft YaHei" pitchFamily="34" charset="-120"/>
+                        </a:rPr>
+                        <a:t>技术与数据</a:t>
+                      </a:r>
+                      <a:endParaRPr lang="en-US" sz="1300" dirty="0">
+                        <a:latin typeface="Microsoft YaHei" charset="0"/>
+                        <a:ea typeface="Microsoft YaHei" charset="0"/>
+                        <a:cs typeface="Microsoft YaHei" charset="0"/>
+                      </a:endParaRPr>
+                    </a:p>
+                  </a:txBody>
+                  <a:tcPr marL="109728" marR="109728" marT="36576" marB="36576" anchor="ctr">
+                    <a:lnL w="9525" cap="flat" cmpd="sng" algn="ctr">
+                      <a:solidFill>
+                        <a:srgbClr val="E2E4DF"/>
+                      </a:solidFill>
+                      <a:prstDash val="solid"/>
+                      <a:round/>
+                      <a:headEnd type="none" w="med" len="med"/>
+                      <a:tailEnd type="none" w="med" len="med"/>
+                    </a:lnL>
+                    <a:lnR w="9525" cap="flat" cmpd="sng" algn="ctr">
+                      <a:solidFill>
+                        <a:srgbClr val="E2E4DF"/>
+                      </a:solidFill>
+                      <a:prstDash val="solid"/>
+                      <a:round/>
+                      <a:headEnd type="none" w="med" len="med"/>
+                      <a:tailEnd type="none" w="med" len="med"/>
+                    </a:lnR>
+                    <a:lnT w="9525" cap="flat" cmpd="sng" algn="ctr">
+                      <a:solidFill>
+                        <a:srgbClr val="E2E4DF"/>
+                      </a:solidFill>
+                      <a:prstDash val="solid"/>
+                      <a:round/>
+                      <a:headEnd type="none" w="med" len="med"/>
+                      <a:tailEnd type="none" w="med" len="med"/>
+                    </a:lnT>
+                    <a:lnB w="9525" cap="flat" cmpd="sng" algn="ctr">
+                      <a:solidFill>
+                        <a:srgbClr val="E2E4DF"/>
+                      </a:solidFill>
+                      <a:prstDash val="solid"/>
+                      <a:round/>
+                      <a:headEnd type="none" w="med" len="med"/>
+                      <a:tailEnd type="none" w="med" len="med"/>
+                    </a:lnB>
+                    <a:solidFill>
+                      <a:srgbClr val="F8F9F6"/>
+                    </a:solidFill>
+                  </a:tcPr>
+                </a:tc>
+                <a:tc>
+                  <a:txBody>
+                    <a:bodyPr/>
+                    <a:lstStyle/>
+                    <a:p>
+                      <a:pPr indent="0" marL="0">
+                        <a:buNone/>
+                      </a:pPr>
+                      <a:r>
+                        <a:rPr lang="en-US" sz="1300" dirty="0">
+                          <a:solidFill>
+                            <a:srgbClr val="16191F"/>
+                          </a:solidFill>
+                          <a:latin typeface="Microsoft YaHei" pitchFamily="34" charset="0"/>
+                          <a:ea typeface="Microsoft YaHei" pitchFamily="34" charset="-122"/>
+                          <a:cs typeface="Microsoft YaHei" pitchFamily="34" charset="-120"/>
+                        </a:rPr>
+                        <a:t>管理层、IT</a:t>
+                      </a:r>
+                      <a:endParaRPr lang="en-US" sz="1300" dirty="0">
+                        <a:latin typeface="Microsoft YaHei" charset="0"/>
+                        <a:ea typeface="Microsoft YaHei" charset="0"/>
+                        <a:cs typeface="Microsoft YaHei" charset="0"/>
+                      </a:endParaRPr>
+                    </a:p>
+                  </a:txBody>
+                  <a:tcPr marL="109728" marR="109728" marT="36576" marB="36576" anchor="ctr">
+                    <a:lnL w="9525" cap="flat" cmpd="sng" algn="ctr">
+                      <a:solidFill>
+                        <a:srgbClr val="E2E4DF"/>
+                      </a:solidFill>
+                      <a:prstDash val="solid"/>
+                      <a:round/>
+                      <a:headEnd type="none" w="med" len="med"/>
+                      <a:tailEnd type="none" w="med" len="med"/>
+                    </a:lnL>
+                    <a:lnR w="9525" cap="flat" cmpd="sng" algn="ctr">
+                      <a:solidFill>
+                        <a:srgbClr val="E2E4DF"/>
+                      </a:solidFill>
+                      <a:prstDash val="solid"/>
+                      <a:round/>
+                      <a:headEnd type="none" w="med" len="med"/>
+                      <a:tailEnd type="none" w="med" len="med"/>
+                    </a:lnR>
+                    <a:lnT w="9525" cap="flat" cmpd="sng" algn="ctr">
+                      <a:solidFill>
+                        <a:srgbClr val="E2E4DF"/>
+                      </a:solidFill>
+                      <a:prstDash val="solid"/>
+                      <a:round/>
+                      <a:headEnd type="none" w="med" len="med"/>
+                      <a:tailEnd type="none" w="med" len="med"/>
+                    </a:lnT>
+                    <a:lnB w="9525" cap="flat" cmpd="sng" algn="ctr">
+                      <a:solidFill>
+                        <a:srgbClr val="E2E4DF"/>
+                      </a:solidFill>
+                      <a:prstDash val="solid"/>
+                      <a:round/>
+                      <a:headEnd type="none" w="med" len="med"/>
+                      <a:tailEnd type="none" w="med" len="med"/>
+                    </a:lnB>
+                    <a:solidFill>
+                      <a:srgbClr val="F8F9F6"/>
+                    </a:solidFill>
+                  </a:tcPr>
+                </a:tc>
+                <a:tc>
+                  <a:txBody>
+                    <a:bodyPr/>
+                    <a:lstStyle/>
+                    <a:p>
+                      <a:pPr indent="0" marL="0">
+                        <a:buNone/>
+                      </a:pPr>
+                      <a:r>
+                        <a:rPr lang="en-US" sz="1300" dirty="0">
+                          <a:solidFill>
+                            <a:srgbClr val="16191F"/>
+                          </a:solidFill>
+                          <a:latin typeface="Microsoft YaHei" pitchFamily="34" charset="0"/>
+                          <a:ea typeface="Microsoft YaHei" pitchFamily="34" charset="-122"/>
+                          <a:cs typeface="Microsoft YaHei" pitchFamily="34" charset="-120"/>
+                        </a:rPr>
+                        <a:t>旧资料从哪里迁过来？有多少用户？</a:t>
+                      </a:r>
+                      <a:endParaRPr lang="en-US" sz="1300" dirty="0">
+                        <a:latin typeface="Microsoft YaHei" charset="0"/>
+                        <a:ea typeface="Microsoft YaHei" charset="0"/>
+                        <a:cs typeface="Microsoft YaHei" charset="0"/>
+                      </a:endParaRPr>
+                    </a:p>
+                  </a:txBody>
+                  <a:tcPr marL="109728" marR="109728" marT="36576" marB="36576" anchor="ctr">
+                    <a:lnL w="9525" cap="flat" cmpd="sng" algn="ctr">
+                      <a:solidFill>
+                        <a:srgbClr val="E2E4DF"/>
+                      </a:solidFill>
+                      <a:prstDash val="solid"/>
+                      <a:round/>
+                      <a:headEnd type="none" w="med" len="med"/>
+                      <a:tailEnd type="none" w="med" len="med"/>
+                    </a:lnL>
+                    <a:lnR w="9525" cap="flat" cmpd="sng" algn="ctr">
+                      <a:solidFill>
+                        <a:srgbClr val="E2E4DF"/>
+                      </a:solidFill>
+                      <a:prstDash val="solid"/>
+                      <a:round/>
+                      <a:headEnd type="none" w="med" len="med"/>
+                      <a:tailEnd type="none" w="med" len="med"/>
+                    </a:lnR>
+                    <a:lnT w="9525" cap="flat" cmpd="sng" algn="ctr">
+                      <a:solidFill>
+                        <a:srgbClr val="E2E4DF"/>
+                      </a:solidFill>
+                      <a:prstDash val="solid"/>
+                      <a:round/>
+                      <a:headEnd type="none" w="med" len="med"/>
+                      <a:tailEnd type="none" w="med" len="med"/>
+                    </a:lnT>
+                    <a:lnB w="9525" cap="flat" cmpd="sng" algn="ctr">
+                      <a:solidFill>
+                        <a:srgbClr val="E2E4DF"/>
+                      </a:solidFill>
+                      <a:prstDash val="solid"/>
+                      <a:round/>
+                      <a:headEnd type="none" w="med" len="med"/>
+                      <a:tailEnd type="none" w="med" len="med"/>
+                    </a:lnB>
+                    <a:solidFill>
+                      <a:srgbClr val="F8F9F6"/>
                     </a:solidFill>
                   </a:tcPr>
                 </a:tc>
